--- a/10-plantas/01-steelmaking/05-capacitacion/MS-ACE-09/MS-ACE-09_Capacitacion_AMMX.pptx
+++ b/10-plantas/01-steelmaking/05-capacitacion/MS-ACE-09/MS-ACE-09_Capacitacion_AMMX.pptx
@@ -15517,7 +15517,7 @@
                 <a:ea typeface="Century Gothic" pitchFamily="34" charset="-122"/>
                 <a:cs typeface="Century Gothic" pitchFamily="34" charset="-120"/>
               </a:rPr>
-              <a:t>El reingreso se autoriza por escrito con atmósfera en rango, metal sólido y LOTO</a:t>
+              <a:t>Reingreso por escrito: &lt; 10 % LEL, CO &lt; 25 ppm, O₂ 19.5–23.5 %, metal sólido y LOTO</a:t>
             </a:r>
             <a:endParaRPr lang="en-US" sz="1050" dirty="0"/>
           </a:p>
@@ -18260,7 +18260,7 @@
                 <a:ea typeface="Calibri" pitchFamily="34" charset="-122"/>
                 <a:cs typeface="Calibri" pitchFamily="34" charset="-120"/>
               </a:rPr>
-              <a:t>Siguiente paso: OJT supervisado y evaluación práctica (TD-P07); registro en IMaS y DC-3/SIRCE. Validación: visto bueno seguridad (pendientes: técnica, laboral, diseño instruccional).</a:t>
+              <a:t>Siguiente paso: OJT supervisado y evaluación práctica (TD-P07); registro en IMaS y DC-3/SIRCE. Validación: visto bueno técnica, seguridad, laboral, diseño instruccional.</a:t>
             </a:r>
             <a:endParaRPr lang="en-US" sz="750" dirty="0"/>
           </a:p>
